--- a/catalog/editorial/templates/ed_bullets_rows_3.pptx
+++ b/catalog/editorial/templates/ed_bullets_rows_3.pptx
@@ -3577,7 +3577,7 @@
           <a:noFill/>
         </p:spPr>
         <p:txBody>
-          <a:bodyPr wrap="square" lIns="18288" rIns="18288" tIns="13716" bIns="13716">
+          <a:bodyPr wrap="square" anchor="t" lIns="18288" rIns="18288" tIns="13716" bIns="13716">
             <a:noAutofit/>
           </a:bodyPr>
           <a:lstStyle/>
@@ -3632,7 +3632,7 @@
           <a:noFill/>
         </p:spPr>
         <p:txBody>
-          <a:bodyPr wrap="square" lIns="18288" rIns="18288" tIns="13716" bIns="13716">
+          <a:bodyPr wrap="square" anchor="t" lIns="18288" rIns="18288" tIns="13716" bIns="13716">
             <a:noAutofit/>
           </a:bodyPr>
           <a:lstStyle/>
@@ -3687,7 +3687,7 @@
           <a:noFill/>
         </p:spPr>
         <p:txBody>
-          <a:bodyPr wrap="square" lIns="18288" rIns="18288" tIns="13716" bIns="13716">
+          <a:bodyPr wrap="square" anchor="t" lIns="18288" rIns="18288" tIns="13716" bIns="13716">
             <a:noAutofit/>
           </a:bodyPr>
           <a:lstStyle/>
@@ -3786,7 +3786,7 @@
           <a:noFill/>
         </p:spPr>
         <p:txBody>
-          <a:bodyPr wrap="square" lIns="18288" rIns="18288" tIns="13716" bIns="13716">
+          <a:bodyPr wrap="square" anchor="t" lIns="18288" rIns="18288" tIns="13716" bIns="13716">
             <a:noAutofit/>
           </a:bodyPr>
           <a:lstStyle/>
@@ -3841,7 +3841,7 @@
           <a:noFill/>
         </p:spPr>
         <p:txBody>
-          <a:bodyPr wrap="square" lIns="18288" rIns="18288" tIns="13716" bIns="13716">
+          <a:bodyPr wrap="square" anchor="t" lIns="18288" rIns="18288" tIns="13716" bIns="13716">
             <a:noAutofit/>
           </a:bodyPr>
           <a:lstStyle/>
@@ -3931,8 +3931,8 @@
         </p:nvSpPr>
         <p:spPr>
           <a:xfrm>
-            <a:off x="694944" y="2176272"/>
-            <a:ext cx="2834640" cy="685800"/>
+            <a:off x="694944" y="2185415"/>
+            <a:ext cx="2834640" cy="1231391"/>
           </a:xfrm>
           <a:prstGeom prst="rect">
             <a:avLst/>
@@ -3940,7 +3940,7 @@
           <a:noFill/>
         </p:spPr>
         <p:txBody>
-          <a:bodyPr wrap="square" lIns="18288" rIns="18288" tIns="13716" bIns="13716">
+          <a:bodyPr wrap="square" anchor="ctr" lIns="18288" rIns="18288" tIns="13716" bIns="13716">
             <a:noAutofit/>
           </a:bodyPr>
           <a:lstStyle/>
@@ -3986,8 +3986,8 @@
         </p:nvSpPr>
         <p:spPr>
           <a:xfrm>
-            <a:off x="3739896" y="2176272"/>
-            <a:ext cx="7744968" cy="1258823"/>
+            <a:off x="3739896" y="2185415"/>
+            <a:ext cx="7744968" cy="1231391"/>
           </a:xfrm>
           <a:prstGeom prst="rect">
             <a:avLst/>
@@ -3995,7 +3995,7 @@
           <a:noFill/>
         </p:spPr>
         <p:txBody>
-          <a:bodyPr wrap="square" lIns="18288" rIns="18288" tIns="13716" bIns="13716">
+          <a:bodyPr wrap="square" anchor="ctr" lIns="18288" rIns="18288" tIns="13716" bIns="13716">
             <a:noAutofit/>
           </a:bodyPr>
           <a:lstStyle/>
@@ -4085,8 +4085,8 @@
         </p:nvSpPr>
         <p:spPr>
           <a:xfrm>
-            <a:off x="694944" y="3462528"/>
-            <a:ext cx="2834640" cy="685800"/>
+            <a:off x="694944" y="3471672"/>
+            <a:ext cx="2834640" cy="1231391"/>
           </a:xfrm>
           <a:prstGeom prst="rect">
             <a:avLst/>
@@ -4094,7 +4094,7 @@
           <a:noFill/>
         </p:spPr>
         <p:txBody>
-          <a:bodyPr wrap="square" lIns="18288" rIns="18288" tIns="13716" bIns="13716">
+          <a:bodyPr wrap="square" anchor="ctr" lIns="18288" rIns="18288" tIns="13716" bIns="13716">
             <a:noAutofit/>
           </a:bodyPr>
           <a:lstStyle/>
@@ -4140,8 +4140,8 @@
         </p:nvSpPr>
         <p:spPr>
           <a:xfrm>
-            <a:off x="3739896" y="3462528"/>
-            <a:ext cx="7744968" cy="1258823"/>
+            <a:off x="3739896" y="3471672"/>
+            <a:ext cx="7744968" cy="1231391"/>
           </a:xfrm>
           <a:prstGeom prst="rect">
             <a:avLst/>
@@ -4149,7 +4149,7 @@
           <a:noFill/>
         </p:spPr>
         <p:txBody>
-          <a:bodyPr wrap="square" lIns="18288" rIns="18288" tIns="13716" bIns="13716">
+          <a:bodyPr wrap="square" anchor="ctr" lIns="18288" rIns="18288" tIns="13716" bIns="13716">
             <a:noAutofit/>
           </a:bodyPr>
           <a:lstStyle/>
@@ -4239,8 +4239,8 @@
         </p:nvSpPr>
         <p:spPr>
           <a:xfrm>
-            <a:off x="694944" y="4748783"/>
-            <a:ext cx="2834640" cy="685800"/>
+            <a:off x="694944" y="4757928"/>
+            <a:ext cx="2834640" cy="1231391"/>
           </a:xfrm>
           <a:prstGeom prst="rect">
             <a:avLst/>
@@ -4248,7 +4248,7 @@
           <a:noFill/>
         </p:spPr>
         <p:txBody>
-          <a:bodyPr wrap="square" lIns="18288" rIns="18288" tIns="13716" bIns="13716">
+          <a:bodyPr wrap="square" anchor="ctr" lIns="18288" rIns="18288" tIns="13716" bIns="13716">
             <a:noAutofit/>
           </a:bodyPr>
           <a:lstStyle/>
@@ -4294,8 +4294,8 @@
         </p:nvSpPr>
         <p:spPr>
           <a:xfrm>
-            <a:off x="3739896" y="4748783"/>
-            <a:ext cx="7744968" cy="1258823"/>
+            <a:off x="3739896" y="4757928"/>
+            <a:ext cx="7744968" cy="1231391"/>
           </a:xfrm>
           <a:prstGeom prst="rect">
             <a:avLst/>
@@ -4303,7 +4303,7 @@
           <a:noFill/>
         </p:spPr>
         <p:txBody>
-          <a:bodyPr wrap="square" lIns="18288" rIns="18288" tIns="13716" bIns="13716">
+          <a:bodyPr wrap="square" anchor="ctr" lIns="18288" rIns="18288" tIns="13716" bIns="13716">
             <a:noAutofit/>
           </a:bodyPr>
           <a:lstStyle/>
